--- a/AI Fellowship Project on E learning.pptx
+++ b/AI Fellowship Project on E learning.pptx
@@ -17,15 +17,15 @@
     <p:sldId id="269" r:id="rId8"/>
     <p:sldId id="260" r:id="rId9"/>
     <p:sldId id="261" r:id="rId10"/>
-    <p:sldId id="262" r:id="rId11"/>
-    <p:sldId id="270" r:id="rId12"/>
-    <p:sldId id="277" r:id="rId13"/>
-    <p:sldId id="275" r:id="rId14"/>
-    <p:sldId id="276" r:id="rId15"/>
-    <p:sldId id="271" r:id="rId16"/>
-    <p:sldId id="272" r:id="rId17"/>
-    <p:sldId id="278" r:id="rId18"/>
-    <p:sldId id="273" r:id="rId19"/>
+    <p:sldId id="270" r:id="rId11"/>
+    <p:sldId id="277" r:id="rId12"/>
+    <p:sldId id="275" r:id="rId13"/>
+    <p:sldId id="276" r:id="rId14"/>
+    <p:sldId id="271" r:id="rId15"/>
+    <p:sldId id="272" r:id="rId16"/>
+    <p:sldId id="278" r:id="rId17"/>
+    <p:sldId id="273" r:id="rId18"/>
+    <p:sldId id="279" r:id="rId19"/>
     <p:sldId id="274" r:id="rId20"/>
     <p:sldId id="263" r:id="rId21"/>
     <p:sldId id="264" r:id="rId22"/>
@@ -126,6 +126,11 @@
       </a:defRPr>
     </a:lvl9pPr>
   </p:defaultTextStyle>
+  <p:extLst>
+    <p:ext uri="{EFAFB233-063F-42B5-8137-9DF3F51BA10A}">
+      <p15:sldGuideLst xmlns:p15="http://schemas.microsoft.com/office/powerpoint/2012/main"/>
+    </p:ext>
+  </p:extLst>
 </p:presentation>
 </file>
 
@@ -380,90 +385,6 @@
   <p:cSld>
     <p:spTree>
       <p:nvGrpSpPr>
-        <p:cNvPr id="1" name=""/>
-        <p:cNvGrpSpPr/>
-        <p:nvPr/>
-      </p:nvGrpSpPr>
-      <p:grpSpPr>
-        <a:xfrm>
-          <a:off x="0" y="0"/>
-          <a:ext cx="0" cy="0"/>
-          <a:chOff x="0" y="0"/>
-          <a:chExt cx="0" cy="0"/>
-        </a:xfrm>
-      </p:grpSpPr>
-      <p:sp>
-        <p:nvSpPr>
-          <p:cNvPr id="2" name="Slide Image Placeholder 1"/>
-          <p:cNvSpPr>
-            <a:spLocks noGrp="1" noRot="1" noChangeAspect="1"/>
-          </p:cNvSpPr>
-          <p:nvPr>
-            <p:ph type="sldImg"/>
-          </p:nvPr>
-        </p:nvSpPr>
-        <p:spPr/>
-      </p:sp>
-      <p:sp>
-        <p:nvSpPr>
-          <p:cNvPr id="3" name="Notes Placeholder 2"/>
-          <p:cNvSpPr>
-            <a:spLocks noGrp="1"/>
-          </p:cNvSpPr>
-          <p:nvPr>
-            <p:ph type="body" idx="1"/>
-          </p:nvPr>
-        </p:nvSpPr>
-        <p:spPr/>
-        <p:txBody>
-          <a:bodyPr/>
-          <a:lstStyle/>
-          <a:p>
-            <a:endParaRPr lang="en-US"/>
-          </a:p>
-        </p:txBody>
-      </p:sp>
-      <p:sp>
-        <p:nvSpPr>
-          <p:cNvPr id="4" name="Slide Number Placeholder 3"/>
-          <p:cNvSpPr>
-            <a:spLocks noGrp="1"/>
-          </p:cNvSpPr>
-          <p:nvPr>
-            <p:ph type="sldNum" sz="quarter" idx="10"/>
-          </p:nvPr>
-        </p:nvSpPr>
-        <p:spPr/>
-        <p:txBody>
-          <a:bodyPr/>
-          <a:lstStyle/>
-          <a:p>
-            <a:fld id="{F7021451-1387-4CA6-816F-3879F97B5CBC}" type="slidenum">
-              <a:rPr lang="en-US"/>
-              <a:t>10</a:t>
-            </a:fld>
-            <a:endParaRPr lang="en-US"/>
-          </a:p>
-        </p:txBody>
-      </p:sp>
-    </p:spTree>
-    <p:extLst>
-      <p:ext uri="{BB962C8B-B14F-4D97-AF65-F5344CB8AC3E}">
-        <p14:creationId xmlns:p14="http://schemas.microsoft.com/office/powerpoint/2010/main" val="1024086991"/>
-      </p:ext>
-    </p:extLst>
-  </p:cSld>
-  <p:clrMapOvr>
-    <a:masterClrMapping/>
-  </p:clrMapOvr>
-</p:notes>
-</file>
-
-<file path=ppt/notesSlides/notesSlide11.xml><?xml version="1.0" encoding="utf-8"?>
-<p:notes xmlns:a="http://schemas.openxmlformats.org/drawingml/2006/main" xmlns:r="http://schemas.openxmlformats.org/officeDocument/2006/relationships" xmlns:p="http://schemas.openxmlformats.org/presentationml/2006/main">
-  <p:cSld>
-    <p:spTree>
-      <p:nvGrpSpPr>
         <p:cNvPr id="1" name="">
           <a:extLst>
             <a:ext uri="{FF2B5EF4-FFF2-40B4-BE49-F238E27FC236}">
@@ -548,7 +469,7 @@
           <a:p>
             <a:fld id="{F7021451-1387-4CA6-816F-3879F97B5CBC}" type="slidenum">
               <a:rPr lang="en-US"/>
-              <a:t>11</a:t>
+              <a:t>10</a:t>
             </a:fld>
             <a:endParaRPr lang="en-US"/>
           </a:p>
@@ -567,7 +488,7 @@
 </p:notes>
 </file>
 
-<file path=ppt/notesSlides/notesSlide12.xml><?xml version="1.0" encoding="utf-8"?>
+<file path=ppt/notesSlides/notesSlide11.xml><?xml version="1.0" encoding="utf-8"?>
 <p:notes xmlns:a="http://schemas.openxmlformats.org/drawingml/2006/main" xmlns:r="http://schemas.openxmlformats.org/officeDocument/2006/relationships" xmlns:p="http://schemas.openxmlformats.org/presentationml/2006/main">
   <p:cSld>
     <p:spTree>
@@ -656,7 +577,7 @@
           <a:p>
             <a:fld id="{F7021451-1387-4CA6-816F-3879F97B5CBC}" type="slidenum">
               <a:rPr lang="en-US"/>
-              <a:t>12</a:t>
+              <a:t>11</a:t>
             </a:fld>
             <a:endParaRPr lang="en-US"/>
           </a:p>
@@ -675,7 +596,7 @@
 </p:notes>
 </file>
 
-<file path=ppt/notesSlides/notesSlide13.xml><?xml version="1.0" encoding="utf-8"?>
+<file path=ppt/notesSlides/notesSlide12.xml><?xml version="1.0" encoding="utf-8"?>
 <p:notes xmlns:a="http://schemas.openxmlformats.org/drawingml/2006/main" xmlns:r="http://schemas.openxmlformats.org/officeDocument/2006/relationships" xmlns:p="http://schemas.openxmlformats.org/presentationml/2006/main">
   <p:cSld>
     <p:spTree>
@@ -764,7 +685,7 @@
           <a:p>
             <a:fld id="{F7021451-1387-4CA6-816F-3879F97B5CBC}" type="slidenum">
               <a:rPr lang="en-US"/>
-              <a:t>13</a:t>
+              <a:t>12</a:t>
             </a:fld>
             <a:endParaRPr lang="en-US"/>
           </a:p>
@@ -783,7 +704,7 @@
 </p:notes>
 </file>
 
-<file path=ppt/notesSlides/notesSlide14.xml><?xml version="1.0" encoding="utf-8"?>
+<file path=ppt/notesSlides/notesSlide13.xml><?xml version="1.0" encoding="utf-8"?>
 <p:notes xmlns:a="http://schemas.openxmlformats.org/drawingml/2006/main" xmlns:r="http://schemas.openxmlformats.org/officeDocument/2006/relationships" xmlns:p="http://schemas.openxmlformats.org/presentationml/2006/main">
   <p:cSld>
     <p:spTree>
@@ -872,7 +793,7 @@
           <a:p>
             <a:fld id="{F7021451-1387-4CA6-816F-3879F97B5CBC}" type="slidenum">
               <a:rPr lang="en-US"/>
-              <a:t>14</a:t>
+              <a:t>13</a:t>
             </a:fld>
             <a:endParaRPr lang="en-US"/>
           </a:p>
@@ -891,7 +812,7 @@
 </p:notes>
 </file>
 
-<file path=ppt/notesSlides/notesSlide15.xml><?xml version="1.0" encoding="utf-8"?>
+<file path=ppt/notesSlides/notesSlide14.xml><?xml version="1.0" encoding="utf-8"?>
 <p:notes xmlns:a="http://schemas.openxmlformats.org/drawingml/2006/main" xmlns:r="http://schemas.openxmlformats.org/officeDocument/2006/relationships" xmlns:p="http://schemas.openxmlformats.org/presentationml/2006/main">
   <p:cSld>
     <p:spTree>
@@ -980,7 +901,7 @@
           <a:p>
             <a:fld id="{F7021451-1387-4CA6-816F-3879F97B5CBC}" type="slidenum">
               <a:rPr lang="en-US"/>
-              <a:t>15</a:t>
+              <a:t>14</a:t>
             </a:fld>
             <a:endParaRPr lang="en-US"/>
           </a:p>
@@ -999,7 +920,7 @@
 </p:notes>
 </file>
 
-<file path=ppt/notesSlides/notesSlide16.xml><?xml version="1.0" encoding="utf-8"?>
+<file path=ppt/notesSlides/notesSlide15.xml><?xml version="1.0" encoding="utf-8"?>
 <p:notes xmlns:a="http://schemas.openxmlformats.org/drawingml/2006/main" xmlns:r="http://schemas.openxmlformats.org/officeDocument/2006/relationships" xmlns:p="http://schemas.openxmlformats.org/presentationml/2006/main">
   <p:cSld>
     <p:spTree>
@@ -1088,7 +1009,7 @@
           <a:p>
             <a:fld id="{F7021451-1387-4CA6-816F-3879F97B5CBC}" type="slidenum">
               <a:rPr lang="en-US"/>
-              <a:t>16</a:t>
+              <a:t>15</a:t>
             </a:fld>
             <a:endParaRPr lang="en-US"/>
           </a:p>
@@ -1107,7 +1028,7 @@
 </p:notes>
 </file>
 
-<file path=ppt/notesSlides/notesSlide17.xml><?xml version="1.0" encoding="utf-8"?>
+<file path=ppt/notesSlides/notesSlide16.xml><?xml version="1.0" encoding="utf-8"?>
 <p:notes xmlns:a="http://schemas.openxmlformats.org/drawingml/2006/main" xmlns:r="http://schemas.openxmlformats.org/officeDocument/2006/relationships" xmlns:p="http://schemas.openxmlformats.org/presentationml/2006/main">
   <p:cSld>
     <p:spTree>
@@ -1196,7 +1117,7 @@
           <a:p>
             <a:fld id="{F7021451-1387-4CA6-816F-3879F97B5CBC}" type="slidenum">
               <a:rPr lang="en-US"/>
-              <a:t>17</a:t>
+              <a:t>16</a:t>
             </a:fld>
             <a:endParaRPr lang="en-US"/>
           </a:p>
@@ -1215,7 +1136,7 @@
 </p:notes>
 </file>
 
-<file path=ppt/notesSlides/notesSlide18.xml><?xml version="1.0" encoding="utf-8"?>
+<file path=ppt/notesSlides/notesSlide17.xml><?xml version="1.0" encoding="utf-8"?>
 <p:notes xmlns:a="http://schemas.openxmlformats.org/drawingml/2006/main" xmlns:r="http://schemas.openxmlformats.org/officeDocument/2006/relationships" xmlns:p="http://schemas.openxmlformats.org/presentationml/2006/main">
   <p:cSld>
     <p:spTree>
@@ -1304,7 +1225,7 @@
           <a:p>
             <a:fld id="{F7021451-1387-4CA6-816F-3879F97B5CBC}" type="slidenum">
               <a:rPr lang="en-US"/>
-              <a:t>18</a:t>
+              <a:t>17</a:t>
             </a:fld>
             <a:endParaRPr lang="en-US"/>
           </a:p>
@@ -1314,6 +1235,114 @@
     <p:extLst>
       <p:ext uri="{BB962C8B-B14F-4D97-AF65-F5344CB8AC3E}">
         <p14:creationId xmlns:p14="http://schemas.microsoft.com/office/powerpoint/2010/main" val="1398446774"/>
+      </p:ext>
+    </p:extLst>
+  </p:cSld>
+  <p:clrMapOvr>
+    <a:masterClrMapping/>
+  </p:clrMapOvr>
+</p:notes>
+</file>
+
+<file path=ppt/notesSlides/notesSlide18.xml><?xml version="1.0" encoding="utf-8"?>
+<p:notes xmlns:a="http://schemas.openxmlformats.org/drawingml/2006/main" xmlns:r="http://schemas.openxmlformats.org/officeDocument/2006/relationships" xmlns:p="http://schemas.openxmlformats.org/presentationml/2006/main">
+  <p:cSld>
+    <p:spTree>
+      <p:nvGrpSpPr>
+        <p:cNvPr id="1" name="">
+          <a:extLst>
+            <a:ext uri="{FF2B5EF4-FFF2-40B4-BE49-F238E27FC236}">
+              <a16:creationId xmlns:a16="http://schemas.microsoft.com/office/drawing/2014/main" id="{8D2BDE6B-1EA1-C6BE-6487-97B6C3593A5B}"/>
+            </a:ext>
+          </a:extLst>
+        </p:cNvPr>
+        <p:cNvGrpSpPr/>
+        <p:nvPr/>
+      </p:nvGrpSpPr>
+      <p:grpSpPr>
+        <a:xfrm>
+          <a:off x="0" y="0"/>
+          <a:ext cx="0" cy="0"/>
+          <a:chOff x="0" y="0"/>
+          <a:chExt cx="0" cy="0"/>
+        </a:xfrm>
+      </p:grpSpPr>
+      <p:sp>
+        <p:nvSpPr>
+          <p:cNvPr id="2" name="Slide Image Placeholder 1">
+            <a:extLst>
+              <a:ext uri="{FF2B5EF4-FFF2-40B4-BE49-F238E27FC236}">
+                <a16:creationId xmlns:a16="http://schemas.microsoft.com/office/drawing/2014/main" id="{31A6327E-204D-5A90-B9D4-B609222F82C9}"/>
+              </a:ext>
+            </a:extLst>
+          </p:cNvPr>
+          <p:cNvSpPr>
+            <a:spLocks noGrp="1" noRot="1" noChangeAspect="1"/>
+          </p:cNvSpPr>
+          <p:nvPr>
+            <p:ph type="sldImg"/>
+          </p:nvPr>
+        </p:nvSpPr>
+        <p:spPr/>
+      </p:sp>
+      <p:sp>
+        <p:nvSpPr>
+          <p:cNvPr id="3" name="Notes Placeholder 2">
+            <a:extLst>
+              <a:ext uri="{FF2B5EF4-FFF2-40B4-BE49-F238E27FC236}">
+                <a16:creationId xmlns:a16="http://schemas.microsoft.com/office/drawing/2014/main" id="{F6DFF99B-C81A-9D76-32ED-DAC87A054970}"/>
+              </a:ext>
+            </a:extLst>
+          </p:cNvPr>
+          <p:cNvSpPr>
+            <a:spLocks noGrp="1"/>
+          </p:cNvSpPr>
+          <p:nvPr>
+            <p:ph type="body" idx="1"/>
+          </p:nvPr>
+        </p:nvSpPr>
+        <p:spPr/>
+        <p:txBody>
+          <a:bodyPr/>
+          <a:lstStyle/>
+          <a:p>
+            <a:endParaRPr lang="en-US"/>
+          </a:p>
+        </p:txBody>
+      </p:sp>
+      <p:sp>
+        <p:nvSpPr>
+          <p:cNvPr id="4" name="Slide Number Placeholder 3">
+            <a:extLst>
+              <a:ext uri="{FF2B5EF4-FFF2-40B4-BE49-F238E27FC236}">
+                <a16:creationId xmlns:a16="http://schemas.microsoft.com/office/drawing/2014/main" id="{FB59B567-E119-803F-35F8-5DFC861670DF}"/>
+              </a:ext>
+            </a:extLst>
+          </p:cNvPr>
+          <p:cNvSpPr>
+            <a:spLocks noGrp="1"/>
+          </p:cNvSpPr>
+          <p:nvPr>
+            <p:ph type="sldNum" sz="quarter" idx="10"/>
+          </p:nvPr>
+        </p:nvSpPr>
+        <p:spPr/>
+        <p:txBody>
+          <a:bodyPr/>
+          <a:lstStyle/>
+          <a:p>
+            <a:fld id="{F7021451-1387-4CA6-816F-3879F97B5CBC}" type="slidenum">
+              <a:rPr lang="en-US"/>
+              <a:t>18</a:t>
+            </a:fld>
+            <a:endParaRPr lang="en-US"/>
+          </a:p>
+        </p:txBody>
+      </p:sp>
+    </p:spTree>
+    <p:extLst>
+      <p:ext uri="{BB962C8B-B14F-4D97-AF65-F5344CB8AC3E}">
+        <p14:creationId xmlns:p14="http://schemas.microsoft.com/office/powerpoint/2010/main" val="3339649405"/>
       </p:ext>
     </p:extLst>
   </p:cSld>
@@ -3599,711 +3628,6 @@
 
 <file path=ppt/slides/slide10.xml><?xml version="1.0" encoding="utf-8"?>
 <p:sld xmlns:a="http://schemas.openxmlformats.org/drawingml/2006/main" xmlns:r="http://schemas.openxmlformats.org/officeDocument/2006/relationships" xmlns:p="http://schemas.openxmlformats.org/presentationml/2006/main">
-  <p:cSld name="Slide 7">
-    <p:bg>
-      <p:bgPr>
-        <a:solidFill>
-          <a:srgbClr val="FFFFFF"/>
-        </a:solidFill>
-        <a:effectLst/>
-      </p:bgPr>
-    </p:bg>
-    <p:spTree>
-      <p:nvGrpSpPr>
-        <p:cNvPr id="1" name=""/>
-        <p:cNvGrpSpPr/>
-        <p:nvPr/>
-      </p:nvGrpSpPr>
-      <p:grpSpPr>
-        <a:xfrm>
-          <a:off x="0" y="0"/>
-          <a:ext cx="0" cy="0"/>
-          <a:chOff x="0" y="0"/>
-          <a:chExt cx="0" cy="0"/>
-        </a:xfrm>
-      </p:grpSpPr>
-      <p:sp>
-        <p:nvSpPr>
-          <p:cNvPr id="2" name="Shape 0"/>
-          <p:cNvSpPr/>
-          <p:nvPr/>
-        </p:nvSpPr>
-        <p:spPr>
-          <a:xfrm>
-            <a:off x="0" y="0"/>
-            <a:ext cx="9144000" cy="502920"/>
-          </a:xfrm>
-          <a:prstGeom prst="rect">
-            <a:avLst/>
-          </a:prstGeom>
-          <a:solidFill>
-            <a:srgbClr val="1B3A8A"/>
-          </a:solidFill>
-          <a:ln/>
-        </p:spPr>
-      </p:sp>
-      <p:sp>
-        <p:nvSpPr>
-          <p:cNvPr id="3" name="Text 1"/>
-          <p:cNvSpPr/>
-          <p:nvPr/>
-        </p:nvSpPr>
-        <p:spPr>
-          <a:xfrm>
-            <a:off x="7772400" y="45720"/>
-            <a:ext cx="1280160" cy="411480"/>
-          </a:xfrm>
-          <a:prstGeom prst="rect">
-            <a:avLst/>
-          </a:prstGeom>
-          <a:noFill/>
-          <a:ln/>
-        </p:spPr>
-        <p:txBody>
-          <a:bodyPr wrap="square" rtlCol="0" anchor="ctr"/>
-          <a:lstStyle/>
-          <a:p>
-            <a:pPr marL="0" indent="0" algn="r">
-              <a:buNone/>
-            </a:pPr>
-            <a:r>
-              <a:rPr lang="en-US" sz="800" b="1">
-                <a:solidFill>
-                  <a:srgbClr val="4FC3F7"/>
-                </a:solidFill>
-                <a:latin typeface="Calibri" pitchFamily="34" charset="0"/>
-                <a:ea typeface="Calibri" pitchFamily="34" charset="-122"/>
-                <a:cs typeface="Calibri" pitchFamily="34" charset="-120"/>
-              </a:rPr>
-              <a:t>edunet</a:t>
-            </a:r>
-            <a:endParaRPr lang="en-US" sz="800"/>
-          </a:p>
-          <a:p>
-            <a:pPr marL="0" indent="0" algn="r">
-              <a:buNone/>
-            </a:pPr>
-            <a:r>
-              <a:rPr lang="en-US" sz="800" b="1">
-                <a:solidFill>
-                  <a:srgbClr val="4FC3F7"/>
-                </a:solidFill>
-                <a:latin typeface="Calibri" pitchFamily="34" charset="0"/>
-                <a:ea typeface="Calibri" pitchFamily="34" charset="-122"/>
-                <a:cs typeface="Calibri" pitchFamily="34" charset="-120"/>
-              </a:rPr>
-              <a:t>foundation</a:t>
-            </a:r>
-            <a:endParaRPr lang="en-US" sz="800"/>
-          </a:p>
-        </p:txBody>
-      </p:sp>
-      <p:sp>
-        <p:nvSpPr>
-          <p:cNvPr id="4" name="Text 2"/>
-          <p:cNvSpPr/>
-          <p:nvPr/>
-        </p:nvSpPr>
-        <p:spPr>
-          <a:xfrm>
-            <a:off x="320040" y="621792"/>
-            <a:ext cx="8229600" cy="438912"/>
-          </a:xfrm>
-          <a:prstGeom prst="rect">
-            <a:avLst/>
-          </a:prstGeom>
-          <a:noFill/>
-          <a:ln/>
-        </p:spPr>
-        <p:txBody>
-          <a:bodyPr wrap="square" rtlCol="0" anchor="ctr"/>
-          <a:lstStyle/>
-          <a:p>
-            <a:pPr marL="0" indent="0">
-              <a:buNone/>
-            </a:pPr>
-            <a:r>
-              <a:rPr lang="en-US" sz="2200" b="1">
-                <a:solidFill>
-                  <a:srgbClr val="1B3A8A"/>
-                </a:solidFill>
-                <a:latin typeface="Calibri" pitchFamily="34" charset="0"/>
-                <a:ea typeface="Calibri" pitchFamily="34" charset="-122"/>
-                <a:cs typeface="Calibri" pitchFamily="34" charset="-120"/>
-              </a:rPr>
-              <a:t>Live Demo of Project</a:t>
-            </a:r>
-            <a:endParaRPr lang="en-US" sz="2200"/>
-          </a:p>
-        </p:txBody>
-      </p:sp>
-      <p:sp>
-        <p:nvSpPr>
-          <p:cNvPr id="5" name="Shape 3"/>
-          <p:cNvSpPr/>
-          <p:nvPr/>
-        </p:nvSpPr>
-        <p:spPr>
-          <a:xfrm>
-            <a:off x="0" y="4983480"/>
-            <a:ext cx="9144000" cy="160020"/>
-          </a:xfrm>
-          <a:prstGeom prst="rect">
-            <a:avLst/>
-          </a:prstGeom>
-          <a:solidFill>
-            <a:srgbClr val="1B3A8A"/>
-          </a:solidFill>
-          <a:ln/>
-        </p:spPr>
-      </p:sp>
-      <p:sp>
-        <p:nvSpPr>
-          <p:cNvPr id="6" name="Text 4"/>
-          <p:cNvSpPr/>
-          <p:nvPr/>
-        </p:nvSpPr>
-        <p:spPr>
-          <a:xfrm>
-            <a:off x="365760" y="1115568"/>
-            <a:ext cx="8412480" cy="320040"/>
-          </a:xfrm>
-          <a:prstGeom prst="rect">
-            <a:avLst/>
-          </a:prstGeom>
-          <a:noFill/>
-          <a:ln/>
-        </p:spPr>
-        <p:txBody>
-          <a:bodyPr wrap="square" rtlCol="0" anchor="ctr"/>
-          <a:lstStyle/>
-          <a:p>
-            <a:pPr marL="0" indent="0">
-              <a:buNone/>
-            </a:pPr>
-            <a:r>
-              <a:rPr lang="en-US" sz="1200" i="1">
-                <a:solidFill>
-                  <a:srgbClr val="607D8B"/>
-                </a:solidFill>
-                <a:latin typeface="Calibri" pitchFamily="34" charset="0"/>
-                <a:ea typeface="Calibri" pitchFamily="34" charset="-122"/>
-                <a:cs typeface="Calibri" pitchFamily="34" charset="-120"/>
-              </a:rPr>
-              <a:t>Here's the list of some demo screenshots / features of the project:</a:t>
-            </a:r>
-            <a:endParaRPr lang="en-US" sz="1200"/>
-          </a:p>
-        </p:txBody>
-      </p:sp>
-      <p:sp>
-        <p:nvSpPr>
-          <p:cNvPr id="7" name="Shape 5"/>
-          <p:cNvSpPr/>
-          <p:nvPr/>
-        </p:nvSpPr>
-        <p:spPr>
-          <a:xfrm>
-            <a:off x="978408" y="1463040"/>
-            <a:ext cx="1371600" cy="1371600"/>
-          </a:xfrm>
-          <a:prstGeom prst="ellipse">
-            <a:avLst/>
-          </a:prstGeom>
-          <a:solidFill>
-            <a:srgbClr val="ECEFF1"/>
-          </a:solidFill>
-          <a:ln w="38100">
-            <a:solidFill>
-              <a:srgbClr val="FFFFFF"/>
-            </a:solidFill>
-            <a:prstDash val="solid"/>
-          </a:ln>
-        </p:spPr>
-      </p:sp>
-      <p:sp>
-        <p:nvSpPr>
-          <p:cNvPr id="8" name="Text 6"/>
-          <p:cNvSpPr/>
-          <p:nvPr/>
-        </p:nvSpPr>
-        <p:spPr>
-          <a:xfrm>
-            <a:off x="978408" y="1463040"/>
-            <a:ext cx="1371600" cy="1371600"/>
-          </a:xfrm>
-          <a:prstGeom prst="rect">
-            <a:avLst/>
-          </a:prstGeom>
-          <a:noFill/>
-          <a:ln/>
-        </p:spPr>
-        <p:txBody>
-          <a:bodyPr wrap="square" rtlCol="0" anchor="ctr"/>
-          <a:lstStyle/>
-          <a:p>
-            <a:pPr marL="0" indent="0" algn="ctr">
-              <a:buNone/>
-            </a:pPr>
-            <a:r>
-              <a:rPr lang="en-US" sz="3600">
-                <a:solidFill>
-                  <a:srgbClr val="000000"/>
-                </a:solidFill>
-              </a:rPr>
-              <a:t>🖼</a:t>
-            </a:r>
-            <a:endParaRPr lang="en-US" sz="3600"/>
-          </a:p>
-        </p:txBody>
-      </p:sp>
-      <p:sp>
-        <p:nvSpPr>
-          <p:cNvPr id="9" name="Shape 7"/>
-          <p:cNvSpPr/>
-          <p:nvPr/>
-        </p:nvSpPr>
-        <p:spPr>
-          <a:xfrm>
-            <a:off x="274320" y="2011680"/>
-            <a:ext cx="2788920" cy="2651760"/>
-          </a:xfrm>
-          <a:prstGeom prst="rect">
-            <a:avLst/>
-          </a:prstGeom>
-          <a:solidFill>
-            <a:srgbClr val="1565C0"/>
-          </a:solidFill>
-          <a:ln/>
-          <a:effectLst>
-            <a:outerShdw blurRad="101600" dist="38100" dir="8100000" algn="bl" rotWithShape="0">
-              <a:srgbClr val="000000">
-                <a:alpha val="15000"/>
-              </a:srgbClr>
-            </a:outerShdw>
-          </a:effectLst>
-        </p:spPr>
-      </p:sp>
-      <p:sp>
-        <p:nvSpPr>
-          <p:cNvPr id="10" name="Text 8"/>
-          <p:cNvSpPr/>
-          <p:nvPr/>
-        </p:nvSpPr>
-        <p:spPr>
-          <a:xfrm>
-            <a:off x="274320" y="2651760"/>
-            <a:ext cx="2788920" cy="411480"/>
-          </a:xfrm>
-          <a:prstGeom prst="rect">
-            <a:avLst/>
-          </a:prstGeom>
-          <a:noFill/>
-          <a:ln/>
-        </p:spPr>
-        <p:txBody>
-          <a:bodyPr wrap="square" rtlCol="0" anchor="ctr"/>
-          <a:lstStyle/>
-          <a:p>
-            <a:pPr marL="0" indent="0" algn="ctr">
-              <a:buNone/>
-            </a:pPr>
-            <a:r>
-              <a:rPr lang="en-US" sz="1600" b="1">
-                <a:solidFill>
-                  <a:srgbClr val="FFFFFF"/>
-                </a:solidFill>
-                <a:latin typeface="Calibri" pitchFamily="34" charset="0"/>
-                <a:ea typeface="Calibri" pitchFamily="34" charset="-122"/>
-                <a:cs typeface="Calibri" pitchFamily="34" charset="-120"/>
-              </a:rPr>
-              <a:t>Demo 1</a:t>
-            </a:r>
-            <a:endParaRPr lang="en-US" sz="1600"/>
-          </a:p>
-        </p:txBody>
-      </p:sp>
-      <p:sp>
-        <p:nvSpPr>
-          <p:cNvPr id="11" name="Text 9"/>
-          <p:cNvSpPr/>
-          <p:nvPr/>
-        </p:nvSpPr>
-        <p:spPr>
-          <a:xfrm>
-            <a:off x="411480" y="3127248"/>
-            <a:ext cx="2514600" cy="1371600"/>
-          </a:xfrm>
-          <a:prstGeom prst="rect">
-            <a:avLst/>
-          </a:prstGeom>
-          <a:noFill/>
-          <a:ln/>
-        </p:spPr>
-        <p:txBody>
-          <a:bodyPr wrap="square" rtlCol="0" anchor="ctr"/>
-          <a:lstStyle/>
-          <a:p>
-            <a:pPr marL="0" indent="0" algn="ctr">
-              <a:buNone/>
-            </a:pPr>
-            <a:r>
-              <a:rPr lang="en-US" sz="1050">
-                <a:solidFill>
-                  <a:srgbClr val="FFFFFF"/>
-                </a:solidFill>
-                <a:latin typeface="Calibri" pitchFamily="34" charset="0"/>
-                <a:ea typeface="Calibri" pitchFamily="34" charset="-122"/>
-                <a:cs typeface="Calibri" pitchFamily="34" charset="-120"/>
-              </a:rPr>
-              <a:t>[Add description of Demo 1 here — what this demo shows, key features, and results achieved.]</a:t>
-            </a:r>
-            <a:endParaRPr lang="en-US" sz="1050"/>
-          </a:p>
-        </p:txBody>
-      </p:sp>
-      <p:sp>
-        <p:nvSpPr>
-          <p:cNvPr id="12" name="Shape 10"/>
-          <p:cNvSpPr/>
-          <p:nvPr/>
-        </p:nvSpPr>
-        <p:spPr>
-          <a:xfrm>
-            <a:off x="3922776" y="1463040"/>
-            <a:ext cx="1371600" cy="1371600"/>
-          </a:xfrm>
-          <a:prstGeom prst="ellipse">
-            <a:avLst/>
-          </a:prstGeom>
-          <a:solidFill>
-            <a:srgbClr val="ECEFF1"/>
-          </a:solidFill>
-          <a:ln w="38100">
-            <a:solidFill>
-              <a:srgbClr val="FFFFFF"/>
-            </a:solidFill>
-            <a:prstDash val="solid"/>
-          </a:ln>
-        </p:spPr>
-      </p:sp>
-      <p:sp>
-        <p:nvSpPr>
-          <p:cNvPr id="13" name="Text 11"/>
-          <p:cNvSpPr/>
-          <p:nvPr/>
-        </p:nvSpPr>
-        <p:spPr>
-          <a:xfrm>
-            <a:off x="3922776" y="1463040"/>
-            <a:ext cx="1371600" cy="1371600"/>
-          </a:xfrm>
-          <a:prstGeom prst="rect">
-            <a:avLst/>
-          </a:prstGeom>
-          <a:noFill/>
-          <a:ln/>
-        </p:spPr>
-        <p:txBody>
-          <a:bodyPr wrap="square" rtlCol="0" anchor="ctr"/>
-          <a:lstStyle/>
-          <a:p>
-            <a:pPr marL="0" indent="0" algn="ctr">
-              <a:buNone/>
-            </a:pPr>
-            <a:r>
-              <a:rPr lang="en-US" sz="3600">
-                <a:solidFill>
-                  <a:srgbClr val="000000"/>
-                </a:solidFill>
-              </a:rPr>
-              <a:t>🖼</a:t>
-            </a:r>
-            <a:endParaRPr lang="en-US" sz="3600"/>
-          </a:p>
-        </p:txBody>
-      </p:sp>
-      <p:sp>
-        <p:nvSpPr>
-          <p:cNvPr id="14" name="Shape 12"/>
-          <p:cNvSpPr/>
-          <p:nvPr/>
-        </p:nvSpPr>
-        <p:spPr>
-          <a:xfrm>
-            <a:off x="3218688" y="2011680"/>
-            <a:ext cx="2788920" cy="2651760"/>
-          </a:xfrm>
-          <a:prstGeom prst="rect">
-            <a:avLst/>
-          </a:prstGeom>
-          <a:solidFill>
-            <a:srgbClr val="1565C0"/>
-          </a:solidFill>
-          <a:ln/>
-          <a:effectLst>
-            <a:outerShdw blurRad="101600" dist="38100" dir="8100000" algn="bl" rotWithShape="0">
-              <a:srgbClr val="000000">
-                <a:alpha val="15000"/>
-              </a:srgbClr>
-            </a:outerShdw>
-          </a:effectLst>
-        </p:spPr>
-      </p:sp>
-      <p:sp>
-        <p:nvSpPr>
-          <p:cNvPr id="15" name="Text 13"/>
-          <p:cNvSpPr/>
-          <p:nvPr/>
-        </p:nvSpPr>
-        <p:spPr>
-          <a:xfrm>
-            <a:off x="3218688" y="2651760"/>
-            <a:ext cx="2788920" cy="411480"/>
-          </a:xfrm>
-          <a:prstGeom prst="rect">
-            <a:avLst/>
-          </a:prstGeom>
-          <a:noFill/>
-          <a:ln/>
-        </p:spPr>
-        <p:txBody>
-          <a:bodyPr wrap="square" rtlCol="0" anchor="ctr"/>
-          <a:lstStyle/>
-          <a:p>
-            <a:pPr marL="0" indent="0" algn="ctr">
-              <a:buNone/>
-            </a:pPr>
-            <a:r>
-              <a:rPr lang="en-US" sz="1600" b="1">
-                <a:solidFill>
-                  <a:srgbClr val="FFFFFF"/>
-                </a:solidFill>
-                <a:latin typeface="Calibri" pitchFamily="34" charset="0"/>
-                <a:ea typeface="Calibri" pitchFamily="34" charset="-122"/>
-                <a:cs typeface="Calibri" pitchFamily="34" charset="-120"/>
-              </a:rPr>
-              <a:t>Demo 2</a:t>
-            </a:r>
-            <a:endParaRPr lang="en-US" sz="1600"/>
-          </a:p>
-        </p:txBody>
-      </p:sp>
-      <p:sp>
-        <p:nvSpPr>
-          <p:cNvPr id="16" name="Text 14"/>
-          <p:cNvSpPr/>
-          <p:nvPr/>
-        </p:nvSpPr>
-        <p:spPr>
-          <a:xfrm>
-            <a:off x="3355848" y="3127248"/>
-            <a:ext cx="2514600" cy="1371600"/>
-          </a:xfrm>
-          <a:prstGeom prst="rect">
-            <a:avLst/>
-          </a:prstGeom>
-          <a:noFill/>
-          <a:ln/>
-        </p:spPr>
-        <p:txBody>
-          <a:bodyPr wrap="square" rtlCol="0" anchor="ctr"/>
-          <a:lstStyle/>
-          <a:p>
-            <a:pPr marL="0" indent="0" algn="ctr">
-              <a:buNone/>
-            </a:pPr>
-            <a:r>
-              <a:rPr lang="en-US" sz="1050">
-                <a:solidFill>
-                  <a:srgbClr val="FFFFFF"/>
-                </a:solidFill>
-                <a:latin typeface="Calibri" pitchFamily="34" charset="0"/>
-                <a:ea typeface="Calibri" pitchFamily="34" charset="-122"/>
-                <a:cs typeface="Calibri" pitchFamily="34" charset="-120"/>
-              </a:rPr>
-              <a:t>[Add description of Demo 2 here — what this demo shows, key features, and results achieved.]</a:t>
-            </a:r>
-            <a:endParaRPr lang="en-US" sz="1050"/>
-          </a:p>
-        </p:txBody>
-      </p:sp>
-      <p:sp>
-        <p:nvSpPr>
-          <p:cNvPr id="17" name="Shape 15"/>
-          <p:cNvSpPr/>
-          <p:nvPr/>
-        </p:nvSpPr>
-        <p:spPr>
-          <a:xfrm>
-            <a:off x="6867144" y="1463040"/>
-            <a:ext cx="1371600" cy="1371600"/>
-          </a:xfrm>
-          <a:prstGeom prst="ellipse">
-            <a:avLst/>
-          </a:prstGeom>
-          <a:solidFill>
-            <a:srgbClr val="ECEFF1"/>
-          </a:solidFill>
-          <a:ln w="38100">
-            <a:solidFill>
-              <a:srgbClr val="FFFFFF"/>
-            </a:solidFill>
-            <a:prstDash val="solid"/>
-          </a:ln>
-        </p:spPr>
-      </p:sp>
-      <p:sp>
-        <p:nvSpPr>
-          <p:cNvPr id="18" name="Text 16"/>
-          <p:cNvSpPr/>
-          <p:nvPr/>
-        </p:nvSpPr>
-        <p:spPr>
-          <a:xfrm>
-            <a:off x="6867144" y="1463040"/>
-            <a:ext cx="1371600" cy="1371600"/>
-          </a:xfrm>
-          <a:prstGeom prst="rect">
-            <a:avLst/>
-          </a:prstGeom>
-          <a:noFill/>
-          <a:ln/>
-        </p:spPr>
-        <p:txBody>
-          <a:bodyPr wrap="square" rtlCol="0" anchor="ctr"/>
-          <a:lstStyle/>
-          <a:p>
-            <a:pPr marL="0" indent="0" algn="ctr">
-              <a:buNone/>
-            </a:pPr>
-            <a:r>
-              <a:rPr lang="en-US" sz="3600">
-                <a:solidFill>
-                  <a:srgbClr val="000000"/>
-                </a:solidFill>
-              </a:rPr>
-              <a:t>🖼</a:t>
-            </a:r>
-            <a:endParaRPr lang="en-US" sz="3600"/>
-          </a:p>
-        </p:txBody>
-      </p:sp>
-      <p:sp>
-        <p:nvSpPr>
-          <p:cNvPr id="19" name="Shape 17"/>
-          <p:cNvSpPr/>
-          <p:nvPr/>
-        </p:nvSpPr>
-        <p:spPr>
-          <a:xfrm>
-            <a:off x="6163056" y="2011680"/>
-            <a:ext cx="2788920" cy="2651760"/>
-          </a:xfrm>
-          <a:prstGeom prst="rect">
-            <a:avLst/>
-          </a:prstGeom>
-          <a:solidFill>
-            <a:srgbClr val="1565C0"/>
-          </a:solidFill>
-          <a:ln/>
-          <a:effectLst>
-            <a:outerShdw blurRad="101600" dist="38100" dir="8100000" algn="bl" rotWithShape="0">
-              <a:srgbClr val="000000">
-                <a:alpha val="15000"/>
-              </a:srgbClr>
-            </a:outerShdw>
-          </a:effectLst>
-        </p:spPr>
-      </p:sp>
-      <p:sp>
-        <p:nvSpPr>
-          <p:cNvPr id="20" name="Text 18"/>
-          <p:cNvSpPr/>
-          <p:nvPr/>
-        </p:nvSpPr>
-        <p:spPr>
-          <a:xfrm>
-            <a:off x="6163056" y="2651760"/>
-            <a:ext cx="2788920" cy="411480"/>
-          </a:xfrm>
-          <a:prstGeom prst="rect">
-            <a:avLst/>
-          </a:prstGeom>
-          <a:noFill/>
-          <a:ln/>
-        </p:spPr>
-        <p:txBody>
-          <a:bodyPr wrap="square" rtlCol="0" anchor="ctr"/>
-          <a:lstStyle/>
-          <a:p>
-            <a:pPr marL="0" indent="0" algn="ctr">
-              <a:buNone/>
-            </a:pPr>
-            <a:r>
-              <a:rPr lang="en-US" sz="1600" b="1">
-                <a:solidFill>
-                  <a:srgbClr val="FFFFFF"/>
-                </a:solidFill>
-                <a:latin typeface="Calibri" pitchFamily="34" charset="0"/>
-                <a:ea typeface="Calibri" pitchFamily="34" charset="-122"/>
-                <a:cs typeface="Calibri" pitchFamily="34" charset="-120"/>
-              </a:rPr>
-              <a:t>Demo 3</a:t>
-            </a:r>
-            <a:endParaRPr lang="en-US" sz="1600"/>
-          </a:p>
-        </p:txBody>
-      </p:sp>
-      <p:sp>
-        <p:nvSpPr>
-          <p:cNvPr id="21" name="Text 19"/>
-          <p:cNvSpPr/>
-          <p:nvPr/>
-        </p:nvSpPr>
-        <p:spPr>
-          <a:xfrm>
-            <a:off x="6300216" y="3127248"/>
-            <a:ext cx="2514600" cy="1371600"/>
-          </a:xfrm>
-          <a:prstGeom prst="rect">
-            <a:avLst/>
-          </a:prstGeom>
-          <a:noFill/>
-          <a:ln/>
-        </p:spPr>
-        <p:txBody>
-          <a:bodyPr wrap="square" rtlCol="0" anchor="ctr"/>
-          <a:lstStyle/>
-          <a:p>
-            <a:pPr marL="0" indent="0" algn="ctr">
-              <a:buNone/>
-            </a:pPr>
-            <a:r>
-              <a:rPr lang="en-US" sz="1050">
-                <a:solidFill>
-                  <a:srgbClr val="FFFFFF"/>
-                </a:solidFill>
-                <a:latin typeface="Calibri" pitchFamily="34" charset="0"/>
-                <a:ea typeface="Calibri" pitchFamily="34" charset="-122"/>
-                <a:cs typeface="Calibri" pitchFamily="34" charset="-120"/>
-              </a:rPr>
-              <a:t>[Add description of Demo 3 here — what this demo shows, key features, and results achieved.]</a:t>
-            </a:r>
-            <a:endParaRPr lang="en-US" sz="1050"/>
-          </a:p>
-        </p:txBody>
-      </p:sp>
-    </p:spTree>
-  </p:cSld>
-  <p:clrMapOvr>
-    <a:masterClrMapping/>
-  </p:clrMapOvr>
-</p:sld>
-</file>
-
-<file path=ppt/slides/slide11.xml><?xml version="1.0" encoding="utf-8"?>
-<p:sld xmlns:a="http://schemas.openxmlformats.org/drawingml/2006/main" xmlns:r="http://schemas.openxmlformats.org/officeDocument/2006/relationships" xmlns:p="http://schemas.openxmlformats.org/presentationml/2006/main">
   <p:cSld>
     <p:spTree>
       <p:nvGrpSpPr>
@@ -4566,7 +3890,7 @@
 </p:sld>
 </file>
 
-<file path=ppt/slides/slide12.xml><?xml version="1.0" encoding="utf-8"?>
+<file path=ppt/slides/slide11.xml><?xml version="1.0" encoding="utf-8"?>
 <p:sld xmlns:a="http://schemas.openxmlformats.org/drawingml/2006/main" xmlns:r="http://schemas.openxmlformats.org/officeDocument/2006/relationships" xmlns:p="http://schemas.openxmlformats.org/presentationml/2006/main">
   <p:cSld>
     <p:spTree>
@@ -4835,7 +4159,7 @@
 </p:sld>
 </file>
 
-<file path=ppt/slides/slide13.xml><?xml version="1.0" encoding="utf-8"?>
+<file path=ppt/slides/slide12.xml><?xml version="1.0" encoding="utf-8"?>
 <p:sld xmlns:a="http://schemas.openxmlformats.org/drawingml/2006/main" xmlns:r="http://schemas.openxmlformats.org/officeDocument/2006/relationships" xmlns:p="http://schemas.openxmlformats.org/presentationml/2006/main">
   <p:cSld>
     <p:spTree>
@@ -5099,7 +4423,7 @@
 </p:sld>
 </file>
 
-<file path=ppt/slides/slide14.xml><?xml version="1.0" encoding="utf-8"?>
+<file path=ppt/slides/slide13.xml><?xml version="1.0" encoding="utf-8"?>
 <p:sld xmlns:a="http://schemas.openxmlformats.org/drawingml/2006/main" xmlns:r="http://schemas.openxmlformats.org/officeDocument/2006/relationships" xmlns:p="http://schemas.openxmlformats.org/presentationml/2006/main">
   <p:cSld>
     <p:spTree>
@@ -5371,7 +4695,7 @@
 </p:sld>
 </file>
 
-<file path=ppt/slides/slide15.xml><?xml version="1.0" encoding="utf-8"?>
+<file path=ppt/slides/slide14.xml><?xml version="1.0" encoding="utf-8"?>
 <p:sld xmlns:a="http://schemas.openxmlformats.org/drawingml/2006/main" xmlns:r="http://schemas.openxmlformats.org/officeDocument/2006/relationships" xmlns:p="http://schemas.openxmlformats.org/presentationml/2006/main">
   <p:cSld>
     <p:spTree>
@@ -5625,10 +4949,10 @@
       </p:sp>
       <p:pic>
         <p:nvPicPr>
-          <p:cNvPr id="8" name="Picture 7">
+          <p:cNvPr id="9" name="Picture 8">
             <a:extLst>
               <a:ext uri="{FF2B5EF4-FFF2-40B4-BE49-F238E27FC236}">
-                <a16:creationId xmlns:a16="http://schemas.microsoft.com/office/drawing/2014/main" id="{01A277AE-09D5-5625-82E3-5110455B3FFB}"/>
+                <a16:creationId xmlns:a16="http://schemas.microsoft.com/office/drawing/2014/main" id="{E12EDAC3-D343-609B-CE5F-2435CA03014C}"/>
               </a:ext>
             </a:extLst>
           </p:cNvPr>
@@ -5645,8 +4969,8 @@
         </p:blipFill>
         <p:spPr>
           <a:xfrm>
-            <a:off x="5015883" y="1060704"/>
-            <a:ext cx="4036677" cy="3877056"/>
+            <a:off x="5208887" y="621792"/>
+            <a:ext cx="3935114" cy="4361688"/>
           </a:xfrm>
           <a:prstGeom prst="rect">
             <a:avLst/>
@@ -5666,7 +4990,7 @@
 </p:sld>
 </file>
 
-<file path=ppt/slides/slide16.xml><?xml version="1.0" encoding="utf-8"?>
+<file path=ppt/slides/slide15.xml><?xml version="1.0" encoding="utf-8"?>
 <p:sld xmlns:a="http://schemas.openxmlformats.org/drawingml/2006/main" xmlns:r="http://schemas.openxmlformats.org/officeDocument/2006/relationships" xmlns:p="http://schemas.openxmlformats.org/presentationml/2006/main">
   <p:cSld>
     <p:spTree>
@@ -5791,7 +5115,7 @@
         </p:nvSpPr>
         <p:spPr>
           <a:xfrm>
-            <a:off x="320040" y="621792"/>
+            <a:off x="320039" y="713414"/>
             <a:ext cx="8229600" cy="438912"/>
           </a:xfrm>
           <a:prstGeom prst="rect">
@@ -5816,7 +5140,7 @@
                 <a:ea typeface="Calibri" pitchFamily="34" charset="-122"/>
                 <a:cs typeface="Calibri" pitchFamily="34" charset="-120"/>
               </a:rPr>
-              <a:t>BEL &amp; PEE Item‑Wise Analysis</a:t>
+              <a:t>Mean Scores of Benefit (BEL1–BEL9) Dimensions Related to E‑Learning</a:t>
             </a:r>
             <a:endParaRPr lang="en-US" sz="2800" dirty="0"/>
           </a:p>
@@ -5863,7 +5187,7 @@
         <p:spPr>
           <a:xfrm>
             <a:off x="320039" y="1801733"/>
-            <a:ext cx="4251961" cy="1938992"/>
+            <a:ext cx="4251961" cy="2246769"/>
           </a:xfrm>
           <a:prstGeom prst="rect">
             <a:avLst/>
@@ -5882,17 +5206,7 @@
             </a:pPr>
             <a:r>
               <a:rPr lang="en-US" sz="2000" dirty="0"/>
-              <a:t>BEL items highlight flexibility, accessibility, and updated learning materials</a:t>
-            </a:r>
-          </a:p>
-          <a:p>
-            <a:pPr marL="342900" indent="-342900">
-              <a:buFont typeface="Arial" panose="020B0604020202020204" pitchFamily="34" charset="0"/>
-              <a:buChar char="•"/>
-            </a:pPr>
-            <a:r>
-              <a:rPr lang="en-US" sz="2000" dirty="0"/>
-              <a:t>Consistent agreement across most indicators validates construct reliability</a:t>
+              <a:t>Higher mean scores are observed for several BEL dimensions (approaching values of 4.0 and above), Higher mean scores are observed for several BEL dimensions (approaching values of 4.0 and above).</a:t>
             </a:r>
             <a:endParaRPr lang="en-IN" sz="2000" dirty="0"/>
           </a:p>
@@ -5900,10 +5214,10 @@
       </p:sp>
       <p:pic>
         <p:nvPicPr>
-          <p:cNvPr id="8" name="Picture 7">
+          <p:cNvPr id="9" name="Picture 8">
             <a:extLst>
               <a:ext uri="{FF2B5EF4-FFF2-40B4-BE49-F238E27FC236}">
-                <a16:creationId xmlns:a16="http://schemas.microsoft.com/office/drawing/2014/main" id="{E1831147-4553-DF7D-0B4B-B1B5DDC87FB0}"/>
+                <a16:creationId xmlns:a16="http://schemas.microsoft.com/office/drawing/2014/main" id="{D179E299-1A60-BFEA-E1B3-BF1AF3FAD415}"/>
               </a:ext>
             </a:extLst>
           </p:cNvPr>
@@ -5920,8 +5234,8 @@
         </p:blipFill>
         <p:spPr>
           <a:xfrm>
-            <a:off x="4977266" y="1004645"/>
-            <a:ext cx="3572374" cy="3477110"/>
+            <a:off x="4658063" y="1143095"/>
+            <a:ext cx="4165898" cy="3219899"/>
           </a:xfrm>
           <a:prstGeom prst="rect">
             <a:avLst/>
@@ -5941,7 +5255,7 @@
 </p:sld>
 </file>
 
-<file path=ppt/slides/slide17.xml><?xml version="1.0" encoding="utf-8"?>
+<file path=ppt/slides/slide16.xml><?xml version="1.0" encoding="utf-8"?>
 <p:sld xmlns:a="http://schemas.openxmlformats.org/drawingml/2006/main" xmlns:r="http://schemas.openxmlformats.org/officeDocument/2006/relationships" xmlns:p="http://schemas.openxmlformats.org/presentationml/2006/main">
   <p:cSld>
     <p:spTree>
@@ -6091,7 +5405,7 @@
                 <a:ea typeface="Calibri" pitchFamily="34" charset="-122"/>
                 <a:cs typeface="Calibri" pitchFamily="34" charset="-120"/>
               </a:rPr>
-              <a:t>BEL &amp; PEE Item‑Wise Analysis</a:t>
+              <a:t>Perceived Ease of Use (PEE) Item‑wise Mean Scores</a:t>
             </a:r>
             <a:endParaRPr lang="en-US" sz="2800" dirty="0"/>
           </a:p>
@@ -6137,7 +5451,7 @@
         </p:nvSpPr>
         <p:spPr>
           <a:xfrm>
-            <a:off x="320039" y="1618488"/>
+            <a:off x="320039" y="1814424"/>
             <a:ext cx="4251961" cy="1938992"/>
           </a:xfrm>
           <a:prstGeom prst="rect">
@@ -6157,7 +5471,7 @@
             </a:pPr>
             <a:r>
               <a:rPr lang="en-US" sz="2000" dirty="0"/>
-              <a:t>PEE items indicate that platforms are user‑friendly and easy to navigate</a:t>
+              <a:t>Higher mean scores are evident for specific PEE items, with values approaching 4.0 and above. </a:t>
             </a:r>
           </a:p>
           <a:p>
@@ -6167,7 +5481,7 @@
             </a:pPr>
             <a:r>
               <a:rPr lang="en-US" sz="2000" dirty="0"/>
-              <a:t>Consistent agreement across most indicators validates construct reliability</a:t>
+              <a:t>The results confirm that perceived ease of use is positively evaluated by learners.</a:t>
             </a:r>
             <a:endParaRPr lang="en-IN" sz="2000" dirty="0"/>
           </a:p>
@@ -6175,10 +5489,10 @@
       </p:sp>
       <p:pic>
         <p:nvPicPr>
-          <p:cNvPr id="9" name="Picture 8">
+          <p:cNvPr id="8" name="Picture 7">
             <a:extLst>
               <a:ext uri="{FF2B5EF4-FFF2-40B4-BE49-F238E27FC236}">
-                <a16:creationId xmlns:a16="http://schemas.microsoft.com/office/drawing/2014/main" id="{0C00873F-8322-F775-A02E-B1A0B74C5B52}"/>
+                <a16:creationId xmlns:a16="http://schemas.microsoft.com/office/drawing/2014/main" id="{2CC7C2BA-8000-8A5A-EC08-8698006E75A6}"/>
               </a:ext>
             </a:extLst>
           </p:cNvPr>
@@ -6195,8 +5509,8 @@
         </p:blipFill>
         <p:spPr>
           <a:xfrm>
-            <a:off x="5362113" y="1303443"/>
-            <a:ext cx="3187527" cy="3122253"/>
+            <a:off x="4751613" y="1060704"/>
+            <a:ext cx="4139293" cy="3622434"/>
           </a:xfrm>
           <a:prstGeom prst="rect">
             <a:avLst/>
@@ -6216,7 +5530,7 @@
 </p:sld>
 </file>
 
-<file path=ppt/slides/slide18.xml><?xml version="1.0" encoding="utf-8"?>
+<file path=ppt/slides/slide17.xml><?xml version="1.0" encoding="utf-8"?>
 <p:sld xmlns:a="http://schemas.openxmlformats.org/drawingml/2006/main" xmlns:r="http://schemas.openxmlformats.org/officeDocument/2006/relationships" xmlns:p="http://schemas.openxmlformats.org/presentationml/2006/main">
   <p:cSld>
     <p:spTree>
@@ -6412,8 +5726,8 @@
         </p:nvSpPr>
         <p:spPr>
           <a:xfrm>
-            <a:off x="320039" y="1420596"/>
-            <a:ext cx="3887977" cy="2308324"/>
+            <a:off x="442503" y="1776227"/>
+            <a:ext cx="4382590" cy="1754326"/>
           </a:xfrm>
           <a:prstGeom prst="rect">
             <a:avLst/>
@@ -6466,10 +5780,10 @@
       </p:sp>
       <p:pic>
         <p:nvPicPr>
-          <p:cNvPr id="8" name="Picture 7">
+          <p:cNvPr id="9" name="Picture 8">
             <a:extLst>
               <a:ext uri="{FF2B5EF4-FFF2-40B4-BE49-F238E27FC236}">
-                <a16:creationId xmlns:a16="http://schemas.microsoft.com/office/drawing/2014/main" id="{C184840F-5587-F59E-D629-A0CED15BE822}"/>
+                <a16:creationId xmlns:a16="http://schemas.microsoft.com/office/drawing/2014/main" id="{E238E66B-8640-DF6D-64E7-58844FCCFCF5}"/>
               </a:ext>
             </a:extLst>
           </p:cNvPr>
@@ -6486,8 +5800,8 @@
         </p:blipFill>
         <p:spPr>
           <a:xfrm>
-            <a:off x="5033639" y="1179576"/>
-            <a:ext cx="3378841" cy="3566555"/>
+            <a:off x="5367201" y="1040166"/>
+            <a:ext cx="3182439" cy="3897594"/>
           </a:xfrm>
           <a:prstGeom prst="rect">
             <a:avLst/>
@@ -6498,6 +5812,277 @@
     <p:extLst>
       <p:ext uri="{BB962C8B-B14F-4D97-AF65-F5344CB8AC3E}">
         <p14:creationId xmlns:p14="http://schemas.microsoft.com/office/powerpoint/2010/main" val="422929486"/>
+      </p:ext>
+    </p:extLst>
+  </p:cSld>
+  <p:clrMapOvr>
+    <a:masterClrMapping/>
+  </p:clrMapOvr>
+</p:sld>
+</file>
+
+<file path=ppt/slides/slide18.xml><?xml version="1.0" encoding="utf-8"?>
+<p:sld xmlns:a="http://schemas.openxmlformats.org/drawingml/2006/main" xmlns:r="http://schemas.openxmlformats.org/officeDocument/2006/relationships" xmlns:p="http://schemas.openxmlformats.org/presentationml/2006/main">
+  <p:cSld>
+    <p:spTree>
+      <p:nvGrpSpPr>
+        <p:cNvPr id="1" name="">
+          <a:extLst>
+            <a:ext uri="{FF2B5EF4-FFF2-40B4-BE49-F238E27FC236}">
+              <a16:creationId xmlns:a16="http://schemas.microsoft.com/office/drawing/2014/main" id="{979B3C01-4683-AA99-FE55-3296D8002532}"/>
+            </a:ext>
+          </a:extLst>
+        </p:cNvPr>
+        <p:cNvGrpSpPr/>
+        <p:nvPr/>
+      </p:nvGrpSpPr>
+      <p:grpSpPr>
+        <a:xfrm>
+          <a:off x="0" y="0"/>
+          <a:ext cx="0" cy="0"/>
+          <a:chOff x="0" y="0"/>
+          <a:chExt cx="0" cy="0"/>
+        </a:xfrm>
+      </p:grpSpPr>
+      <p:sp>
+        <p:nvSpPr>
+          <p:cNvPr id="2" name="Shape 0">
+            <a:extLst>
+              <a:ext uri="{FF2B5EF4-FFF2-40B4-BE49-F238E27FC236}">
+                <a16:creationId xmlns:a16="http://schemas.microsoft.com/office/drawing/2014/main" id="{FACACA0B-AF63-02A0-66AD-5CBDF8E4835A}"/>
+              </a:ext>
+            </a:extLst>
+          </p:cNvPr>
+          <p:cNvSpPr/>
+          <p:nvPr/>
+        </p:nvSpPr>
+        <p:spPr>
+          <a:xfrm>
+            <a:off x="0" y="0"/>
+            <a:ext cx="9144000" cy="502920"/>
+          </a:xfrm>
+          <a:prstGeom prst="rect">
+            <a:avLst/>
+          </a:prstGeom>
+          <a:solidFill>
+            <a:srgbClr val="1B3A8A"/>
+          </a:solidFill>
+          <a:ln/>
+        </p:spPr>
+      </p:sp>
+      <p:sp>
+        <p:nvSpPr>
+          <p:cNvPr id="3" name="Text 1">
+            <a:extLst>
+              <a:ext uri="{FF2B5EF4-FFF2-40B4-BE49-F238E27FC236}">
+                <a16:creationId xmlns:a16="http://schemas.microsoft.com/office/drawing/2014/main" id="{F6D0705D-E5EF-F94D-B304-5FF5B4B0F93B}"/>
+              </a:ext>
+            </a:extLst>
+          </p:cNvPr>
+          <p:cNvSpPr/>
+          <p:nvPr/>
+        </p:nvSpPr>
+        <p:spPr>
+          <a:xfrm>
+            <a:off x="7772400" y="45720"/>
+            <a:ext cx="1280160" cy="411480"/>
+          </a:xfrm>
+          <a:prstGeom prst="rect">
+            <a:avLst/>
+          </a:prstGeom>
+          <a:noFill/>
+          <a:ln/>
+        </p:spPr>
+        <p:txBody>
+          <a:bodyPr wrap="square" rtlCol="0" anchor="ctr"/>
+          <a:lstStyle/>
+          <a:p>
+            <a:pPr marL="0" indent="0" algn="r">
+              <a:buNone/>
+            </a:pPr>
+            <a:r>
+              <a:rPr lang="en-US" sz="800" b="1">
+                <a:solidFill>
+                  <a:srgbClr val="4FC3F7"/>
+                </a:solidFill>
+                <a:latin typeface="Calibri" pitchFamily="34" charset="0"/>
+                <a:ea typeface="Calibri" pitchFamily="34" charset="-122"/>
+                <a:cs typeface="Calibri" pitchFamily="34" charset="-120"/>
+              </a:rPr>
+              <a:t>edunet</a:t>
+            </a:r>
+            <a:endParaRPr lang="en-US" sz="800"/>
+          </a:p>
+          <a:p>
+            <a:pPr marL="0" indent="0" algn="r">
+              <a:buNone/>
+            </a:pPr>
+            <a:r>
+              <a:rPr lang="en-US" sz="800" b="1">
+                <a:solidFill>
+                  <a:srgbClr val="4FC3F7"/>
+                </a:solidFill>
+                <a:latin typeface="Calibri" pitchFamily="34" charset="0"/>
+                <a:ea typeface="Calibri" pitchFamily="34" charset="-122"/>
+                <a:cs typeface="Calibri" pitchFamily="34" charset="-120"/>
+              </a:rPr>
+              <a:t>foundation</a:t>
+            </a:r>
+            <a:endParaRPr lang="en-US" sz="800"/>
+          </a:p>
+        </p:txBody>
+      </p:sp>
+      <p:sp>
+        <p:nvSpPr>
+          <p:cNvPr id="4" name="Text 2">
+            <a:extLst>
+              <a:ext uri="{FF2B5EF4-FFF2-40B4-BE49-F238E27FC236}">
+                <a16:creationId xmlns:a16="http://schemas.microsoft.com/office/drawing/2014/main" id="{DD5E4CF4-0014-A17D-7D3A-9C6C06826647}"/>
+              </a:ext>
+            </a:extLst>
+          </p:cNvPr>
+          <p:cNvSpPr/>
+          <p:nvPr/>
+        </p:nvSpPr>
+        <p:spPr>
+          <a:xfrm>
+            <a:off x="320040" y="670776"/>
+            <a:ext cx="8229600" cy="438912"/>
+          </a:xfrm>
+          <a:prstGeom prst="rect">
+            <a:avLst/>
+          </a:prstGeom>
+          <a:noFill/>
+          <a:ln/>
+        </p:spPr>
+        <p:txBody>
+          <a:bodyPr wrap="square" rtlCol="0" anchor="ctr"/>
+          <a:lstStyle/>
+          <a:p>
+            <a:pPr marL="0" indent="0">
+              <a:buNone/>
+            </a:pPr>
+            <a:r>
+              <a:rPr lang="en-US" sz="2800" b="1" dirty="0">
+                <a:solidFill>
+                  <a:srgbClr val="1B3A8A"/>
+                </a:solidFill>
+                <a:latin typeface="Calibri" pitchFamily="34" charset="0"/>
+                <a:ea typeface="Calibri" pitchFamily="34" charset="-122"/>
+                <a:cs typeface="Calibri" pitchFamily="34" charset="-120"/>
+              </a:rPr>
+              <a:t>Relationship between Perceived Self‑Efficacy (PSE) and Behavioral Intention (BIE) </a:t>
+            </a:r>
+            <a:endParaRPr lang="en-US" sz="2800" dirty="0"/>
+          </a:p>
+        </p:txBody>
+      </p:sp>
+      <p:sp>
+        <p:nvSpPr>
+          <p:cNvPr id="5" name="Shape 3">
+            <a:extLst>
+              <a:ext uri="{FF2B5EF4-FFF2-40B4-BE49-F238E27FC236}">
+                <a16:creationId xmlns:a16="http://schemas.microsoft.com/office/drawing/2014/main" id="{DC6170C7-DF53-E6FE-AA88-A5D8AFF868B2}"/>
+              </a:ext>
+            </a:extLst>
+          </p:cNvPr>
+          <p:cNvSpPr/>
+          <p:nvPr/>
+        </p:nvSpPr>
+        <p:spPr>
+          <a:xfrm>
+            <a:off x="0" y="4983480"/>
+            <a:ext cx="9144000" cy="160020"/>
+          </a:xfrm>
+          <a:prstGeom prst="rect">
+            <a:avLst/>
+          </a:prstGeom>
+          <a:solidFill>
+            <a:srgbClr val="1B3A8A"/>
+          </a:solidFill>
+          <a:ln/>
+        </p:spPr>
+      </p:sp>
+      <p:sp>
+        <p:nvSpPr>
+          <p:cNvPr id="7" name="TextBox 6">
+            <a:extLst>
+              <a:ext uri="{FF2B5EF4-FFF2-40B4-BE49-F238E27FC236}">
+                <a16:creationId xmlns:a16="http://schemas.microsoft.com/office/drawing/2014/main" id="{F4AD21C9-70B6-6DA1-108C-EA12E63D900C}"/>
+              </a:ext>
+            </a:extLst>
+          </p:cNvPr>
+          <p:cNvSpPr txBox="1"/>
+          <p:nvPr/>
+        </p:nvSpPr>
+        <p:spPr>
+          <a:xfrm>
+            <a:off x="352695" y="1543056"/>
+            <a:ext cx="4219305" cy="1754326"/>
+          </a:xfrm>
+          <a:prstGeom prst="rect">
+            <a:avLst/>
+          </a:prstGeom>
+          <a:noFill/>
+        </p:spPr>
+        <p:txBody>
+          <a:bodyPr wrap="square">
+            <a:spAutoFit/>
+          </a:bodyPr>
+          <a:lstStyle/>
+          <a:p>
+            <a:r>
+              <a:rPr lang="en-US" dirty="0"/>
+              <a:t>Scatter Chart Analysis:</a:t>
+            </a:r>
+          </a:p>
+          <a:p>
+            <a:pPr marL="342900" indent="-342900">
+              <a:buFont typeface="Arial" panose="020B0604020202020204" pitchFamily="34" charset="0"/>
+              <a:buChar char="•"/>
+            </a:pPr>
+            <a:r>
+              <a:rPr lang="en-US" dirty="0"/>
+              <a:t>The findings confirm that perceived self‑efficacy has a statistically meaningful and positive influence on behavioral intention to use e‑learning systems, irrespective of gender.</a:t>
+            </a:r>
+            <a:endParaRPr lang="en-IN" dirty="0"/>
+          </a:p>
+        </p:txBody>
+      </p:sp>
+      <p:pic>
+        <p:nvPicPr>
+          <p:cNvPr id="10" name="Picture 9">
+            <a:extLst>
+              <a:ext uri="{FF2B5EF4-FFF2-40B4-BE49-F238E27FC236}">
+                <a16:creationId xmlns:a16="http://schemas.microsoft.com/office/drawing/2014/main" id="{E28A1D6C-4413-B011-EF60-A6646DF6B5A4}"/>
+              </a:ext>
+            </a:extLst>
+          </p:cNvPr>
+          <p:cNvPicPr>
+            <a:picLocks noChangeAspect="1"/>
+          </p:cNvPicPr>
+          <p:nvPr/>
+        </p:nvPicPr>
+        <p:blipFill>
+          <a:blip r:embed="rId3"/>
+          <a:stretch>
+            <a:fillRect/>
+          </a:stretch>
+        </p:blipFill>
+        <p:spPr>
+          <a:xfrm>
+            <a:off x="5380264" y="1047877"/>
+            <a:ext cx="3411041" cy="3889883"/>
+          </a:xfrm>
+          <a:prstGeom prst="rect">
+            <a:avLst/>
+          </a:prstGeom>
+        </p:spPr>
+      </p:pic>
+    </p:spTree>
+    <p:extLst>
+      <p:ext uri="{BB962C8B-B14F-4D97-AF65-F5344CB8AC3E}">
+        <p14:creationId xmlns:p14="http://schemas.microsoft.com/office/powerpoint/2010/main" val="1245206124"/>
       </p:ext>
     </p:extLst>
   </p:cSld>
@@ -6704,7 +6289,7 @@
         <p:spPr>
           <a:xfrm>
             <a:off x="320039" y="1420596"/>
-            <a:ext cx="8571297" cy="2246769"/>
+            <a:ext cx="8571297" cy="1938992"/>
           </a:xfrm>
           <a:prstGeom prst="rect">
             <a:avLst/>
@@ -6718,34 +6303,50 @@
           <a:lstStyle/>
           <a:p>
             <a:r>
-              <a:rPr lang="en-US" sz="2800" dirty="0"/>
+              <a:rPr lang="en-US" sz="2400" dirty="0"/>
               <a:t>Power BI Dashboard:</a:t>
             </a:r>
           </a:p>
           <a:p>
-            <a:r>
-              <a:rPr lang="en-US" sz="2800" dirty="0"/>
+            <a:pPr marL="342900" indent="-342900">
+              <a:buFont typeface="Arial" panose="020B0604020202020204" pitchFamily="34" charset="0"/>
+              <a:buChar char="•"/>
+            </a:pPr>
+            <a:r>
+              <a:rPr lang="en-US" sz="2400" dirty="0"/>
               <a:t>Interactive filters for gender, age, and course</a:t>
             </a:r>
           </a:p>
           <a:p>
-            <a:r>
-              <a:rPr lang="en-US" sz="2800" dirty="0"/>
+            <a:pPr marL="342900" indent="-342900">
+              <a:buFont typeface="Arial" panose="020B0604020202020204" pitchFamily="34" charset="0"/>
+              <a:buChar char="•"/>
+            </a:pPr>
+            <a:r>
+              <a:rPr lang="en-US" sz="2400" dirty="0"/>
               <a:t>Dynamic charts for TAM constructs</a:t>
             </a:r>
           </a:p>
           <a:p>
-            <a:r>
-              <a:rPr lang="en-US" sz="2800" dirty="0"/>
+            <a:pPr marL="342900" indent="-342900">
+              <a:buFont typeface="Arial" panose="020B0604020202020204" pitchFamily="34" charset="0"/>
+              <a:buChar char="•"/>
+            </a:pPr>
+            <a:r>
+              <a:rPr lang="en-US" sz="2400" dirty="0"/>
               <a:t>Enables quick insights for academic decision‑making</a:t>
             </a:r>
           </a:p>
           <a:p>
-            <a:r>
-              <a:rPr lang="en-US" sz="2800" dirty="0"/>
+            <a:pPr marL="342900" indent="-342900">
+              <a:buFont typeface="Arial" panose="020B0604020202020204" pitchFamily="34" charset="0"/>
+              <a:buChar char="•"/>
+            </a:pPr>
+            <a:r>
+              <a:rPr lang="en-US" sz="2400" dirty="0"/>
               <a:t>Supports exploratory and comparative analysis</a:t>
             </a:r>
-            <a:endParaRPr lang="en-IN" sz="2800" dirty="0"/>
+            <a:endParaRPr lang="en-IN" sz="2400" dirty="0"/>
           </a:p>
         </p:txBody>
       </p:sp>
@@ -8363,7 +7964,23 @@
                 <a:ea typeface="Calibri" pitchFamily="34" charset="-122"/>
                 <a:cs typeface="Calibri" pitchFamily="34" charset="-120"/>
               </a:rPr>
-              <a:t>The study confirms that students have a positive perception of e‑learning systems. High mean scores across TAM constructs demonstrate strong acceptance and intention to use e‑learning platforms. The Power BI dashboard successfully transforms raw survey data into actionable insights, validating the effectiveness of data visualization in educational research. </a:t>
+              <a:t>The study confirms that students have a positive perception of e‑learning systems. High mean scores across TAM constructs demonstrate strong acceptance and intention to use e‑learning platforms. </a:t>
+            </a:r>
+          </a:p>
+          <a:p>
+            <a:pPr marL="0" indent="0">
+              <a:buNone/>
+            </a:pPr>
+            <a:r>
+              <a:rPr lang="en-US" sz="2000" dirty="0">
+                <a:solidFill>
+                  <a:srgbClr val="1A1A2E"/>
+                </a:solidFill>
+                <a:latin typeface="Calibri" pitchFamily="34" charset="0"/>
+                <a:ea typeface="Calibri" pitchFamily="34" charset="-122"/>
+                <a:cs typeface="Calibri" pitchFamily="34" charset="-120"/>
+              </a:rPr>
+              <a:t>The Power BI dashboard successfully transforms raw survey data into actionable insights, validating the effectiveness of data visualization in educational research. </a:t>
             </a:r>
             <a:endParaRPr lang="en-US" sz="2000" dirty="0"/>
           </a:p>

--- a/AI Fellowship Project on E learning.pptx
+++ b/AI Fellowship Project on E learning.pptx
@@ -4087,7 +4087,7 @@
         <p:spPr>
           <a:xfrm>
             <a:off x="412068" y="1879252"/>
-            <a:ext cx="4112261" cy="1384995"/>
+            <a:ext cx="4112261" cy="830997"/>
           </a:xfrm>
           <a:prstGeom prst="rect">
             <a:avLst/>
@@ -4105,14 +4105,14 @@
               <a:buChar char="•"/>
             </a:pPr>
             <a:r>
-              <a:rPr lang="en-US" sz="2800" dirty="0"/>
+              <a:rPr lang="en-US" sz="2400" dirty="0"/>
               <a:t>Majority respondents belong to the 15–24 age group</a:t>
             </a:r>
             <a:r>
-              <a:rPr lang="en-IN" sz="2800" dirty="0"/>
+              <a:rPr lang="en-IN" sz="2400" dirty="0"/>
               <a:t>.</a:t>
             </a:r>
-            <a:endParaRPr lang="en-US" sz="2800" dirty="0"/>
+            <a:endParaRPr lang="en-US" sz="2400" dirty="0"/>
           </a:p>
         </p:txBody>
       </p:sp>
@@ -4837,7 +4837,7 @@
               <a:buNone/>
             </a:pPr>
             <a:r>
-              <a:rPr lang="en-US" sz="2800" b="1" dirty="0">
+              <a:rPr lang="en-US" sz="2400" b="1" dirty="0">
                 <a:solidFill>
                   <a:srgbClr val="1B3A8A"/>
                 </a:solidFill>
@@ -4847,7 +4847,7 @@
               </a:rPr>
               <a:t>Mean Scores of TAM Constructs</a:t>
             </a:r>
-            <a:endParaRPr lang="en-US" sz="2800" dirty="0"/>
+            <a:endParaRPr lang="en-US" sz="2400" dirty="0"/>
           </a:p>
         </p:txBody>
       </p:sp>
@@ -5132,7 +5132,7 @@
               <a:buNone/>
             </a:pPr>
             <a:r>
-              <a:rPr lang="en-US" sz="2800" b="1" dirty="0">
+              <a:rPr lang="en-US" sz="2400" b="1" dirty="0">
                 <a:solidFill>
                   <a:srgbClr val="1B3A8A"/>
                 </a:solidFill>
@@ -5142,7 +5142,7 @@
               </a:rPr>
               <a:t>Mean Scores of Benefit (BEL1–BEL9) Dimensions Related to E‑Learning</a:t>
             </a:r>
-            <a:endParaRPr lang="en-US" sz="2800" dirty="0"/>
+            <a:endParaRPr lang="en-US" sz="2400" dirty="0"/>
           </a:p>
         </p:txBody>
       </p:sp>
@@ -5397,7 +5397,7 @@
               <a:buNone/>
             </a:pPr>
             <a:r>
-              <a:rPr lang="en-US" sz="2800" b="1" dirty="0">
+              <a:rPr lang="en-US" sz="2400" b="1" dirty="0">
                 <a:solidFill>
                   <a:srgbClr val="1B3A8A"/>
                 </a:solidFill>
@@ -5407,7 +5407,7 @@
               </a:rPr>
               <a:t>Perceived Ease of Use (PEE) Item‑wise Mean Scores</a:t>
             </a:r>
-            <a:endParaRPr lang="en-US" sz="2800" dirty="0"/>
+            <a:endParaRPr lang="en-US" sz="2400" dirty="0"/>
           </a:p>
         </p:txBody>
       </p:sp>
@@ -5672,7 +5672,7 @@
               <a:buNone/>
             </a:pPr>
             <a:r>
-              <a:rPr lang="en-US" sz="2800" b="1" dirty="0">
+              <a:rPr lang="en-US" sz="2400" b="1" dirty="0">
                 <a:solidFill>
                   <a:srgbClr val="1B3A8A"/>
                 </a:solidFill>
@@ -5682,7 +5682,7 @@
               </a:rPr>
               <a:t>Relationship Between PUE, PEE, and BIE</a:t>
             </a:r>
-            <a:endParaRPr lang="en-US" sz="2800" dirty="0"/>
+            <a:endParaRPr lang="en-US" sz="2400" dirty="0"/>
           </a:p>
         </p:txBody>
       </p:sp>
@@ -5800,7 +5800,7 @@
         </p:blipFill>
         <p:spPr>
           <a:xfrm>
-            <a:off x="5367201" y="1040166"/>
+            <a:off x="5367201" y="1048555"/>
             <a:ext cx="3182439" cy="3897594"/>
           </a:xfrm>
           <a:prstGeom prst="rect">
@@ -5963,7 +5963,7 @@
               <a:buNone/>
             </a:pPr>
             <a:r>
-              <a:rPr lang="en-US" sz="2800" b="1" dirty="0">
+              <a:rPr lang="en-US" sz="2400" b="1" dirty="0">
                 <a:solidFill>
                   <a:srgbClr val="1B3A8A"/>
                 </a:solidFill>
@@ -5973,7 +5973,7 @@
               </a:rPr>
               <a:t>Relationship between Perceived Self‑Efficacy (PSE) and Behavioral Intention (BIE) </a:t>
             </a:r>
-            <a:endParaRPr lang="en-US" sz="2800" dirty="0"/>
+            <a:endParaRPr lang="en-US" sz="2400" dirty="0"/>
           </a:p>
         </p:txBody>
       </p:sp>
@@ -7118,26 +7118,6 @@
       </p:sp>
       <p:sp>
         <p:nvSpPr>
-          <p:cNvPr id="7" name="Shape 5"/>
-          <p:cNvSpPr/>
-          <p:nvPr/>
-        </p:nvSpPr>
-        <p:spPr>
-          <a:xfrm>
-            <a:off x="365760" y="685800"/>
-            <a:ext cx="8412480" cy="384048"/>
-          </a:xfrm>
-          <a:prstGeom prst="rect">
-            <a:avLst/>
-          </a:prstGeom>
-          <a:solidFill>
-            <a:srgbClr val="E0E0E0"/>
-          </a:solidFill>
-          <a:ln/>
-        </p:spPr>
-      </p:sp>
-      <p:sp>
-        <p:nvSpPr>
           <p:cNvPr id="8" name="Shape 6"/>
           <p:cNvSpPr/>
           <p:nvPr/>
@@ -7242,21 +7222,16 @@
           <a:bodyPr wrap="square" rtlCol="0" anchor="ctr"/>
           <a:lstStyle/>
           <a:p>
-            <a:pPr marL="0" indent="0">
-              <a:buNone/>
-            </a:pPr>
-            <a:r>
-              <a:rPr lang="en-US" sz="900">
-                <a:solidFill>
-                  <a:srgbClr val="607D8B"/>
-                </a:solidFill>
-                <a:latin typeface="Calibri" pitchFamily="34" charset="0"/>
-                <a:ea typeface="Calibri" pitchFamily="34" charset="-122"/>
-                <a:cs typeface="Calibri" pitchFamily="34" charset="-120"/>
-              </a:rPr>
-              <a:t>[https://your-project-demo-link.com]</a:t>
-            </a:r>
-            <a:endParaRPr lang="en-US" sz="900"/>
+            <a:r>
+              <a:rPr lang="en-US" sz="900" dirty="0">
+                <a:hlinkClick r:id="rId3"/>
+              </a:rPr>
+              <a:t>https://drive.google.com/file/d/1W_nhR0rbFnwODVFroQHt8lrYctWEOFwq/view?usp=sharing</a:t>
+            </a:r>
+            <a:r>
+              <a:rPr lang="en-US" sz="900" dirty="0"/>
+              <a:t> </a:t>
+            </a:r>
           </a:p>
         </p:txBody>
       </p:sp>
@@ -7307,14 +7282,14 @@
               <a:buNone/>
             </a:pPr>
             <a:r>
-              <a:rPr lang="en-US" sz="4800">
+              <a:rPr lang="en-US" sz="4800" dirty="0">
                 <a:solidFill>
                   <a:srgbClr val="FFFFFF"/>
                 </a:solidFill>
               </a:rPr>
               <a:t>▶</a:t>
             </a:r>
-            <a:endParaRPr lang="en-US" sz="4800"/>
+            <a:endParaRPr lang="en-US" sz="4800" dirty="0"/>
           </a:p>
         </p:txBody>
       </p:sp>
@@ -7343,7 +7318,7 @@
               <a:buNone/>
             </a:pPr>
             <a:r>
-              <a:rPr lang="en-US" sz="1100" i="1">
+              <a:rPr lang="en-US" sz="1100" i="1" dirty="0">
                 <a:solidFill>
                   <a:srgbClr val="607D8B"/>
                 </a:solidFill>
@@ -7353,14 +7328,14 @@
               </a:rPr>
               <a:t>[Insert your project demo video.</a:t>
             </a:r>
-            <a:endParaRPr lang="en-US" sz="1100"/>
+            <a:endParaRPr lang="en-US" sz="1100" dirty="0"/>
           </a:p>
           <a:p>
             <a:pPr marL="0" indent="0" algn="ctr">
               <a:buNone/>
             </a:pPr>
             <a:r>
-              <a:rPr lang="en-US" sz="1100" i="1">
+              <a:rPr lang="en-US" sz="1100" i="1" dirty="0">
                 <a:solidFill>
                   <a:srgbClr val="607D8B"/>
                 </a:solidFill>
@@ -7370,7 +7345,7 @@
               </a:rPr>
               <a:t>You can embed a video your live project.]</a:t>
             </a:r>
-            <a:endParaRPr lang="en-US" sz="1100"/>
+            <a:endParaRPr lang="en-US" sz="1100" dirty="0"/>
           </a:p>
         </p:txBody>
       </p:sp>
@@ -7508,7 +7483,7 @@
               <a:buNone/>
             </a:pPr>
             <a:r>
-              <a:rPr lang="en-US" sz="2200" b="1">
+              <a:rPr lang="en-US" sz="2400" b="1" dirty="0">
                 <a:solidFill>
                   <a:srgbClr val="1B3A8A"/>
                 </a:solidFill>
@@ -7518,7 +7493,7 @@
               </a:rPr>
               <a:t>Conclusion</a:t>
             </a:r>
-            <a:endParaRPr lang="en-US" sz="2200"/>
+            <a:endParaRPr lang="en-US" sz="2400" dirty="0"/>
           </a:p>
         </p:txBody>
       </p:sp>
@@ -8260,7 +8235,7 @@
               <a:buNone/>
             </a:pPr>
             <a:r>
-              <a:rPr lang="en-US" sz="2200" b="1">
+              <a:rPr lang="en-US" sz="2400" b="1" dirty="0">
                 <a:solidFill>
                   <a:srgbClr val="1B3A8A"/>
                 </a:solidFill>
@@ -8270,7 +8245,7 @@
               </a:rPr>
               <a:t>Future Scope</a:t>
             </a:r>
-            <a:endParaRPr lang="en-US" sz="2200"/>
+            <a:endParaRPr lang="en-US" sz="2400" dirty="0"/>
           </a:p>
         </p:txBody>
       </p:sp>
@@ -9466,7 +9441,7 @@
               <a:buNone/>
             </a:pPr>
             <a:r>
-              <a:rPr lang="en-US" sz="2200" b="1">
+              <a:rPr lang="en-US" sz="2400" b="1" dirty="0">
                 <a:solidFill>
                   <a:srgbClr val="1B3A8A"/>
                 </a:solidFill>
@@ -9476,7 +9451,7 @@
               </a:rPr>
               <a:t>Problem Statement</a:t>
             </a:r>
-            <a:endParaRPr lang="en-US" sz="2200"/>
+            <a:endParaRPr lang="en-US" sz="2400" dirty="0"/>
           </a:p>
         </p:txBody>
       </p:sp>
@@ -10541,7 +10516,7 @@
               <a:buNone/>
             </a:pPr>
             <a:r>
-              <a:rPr lang="en-US" sz="2200" b="1" dirty="0">
+              <a:rPr lang="en-US" sz="2400" b="1" dirty="0">
                 <a:solidFill>
                   <a:srgbClr val="1B3A8A"/>
                 </a:solidFill>
@@ -10551,7 +10526,7 @@
               </a:rPr>
               <a:t>Proposed Solution</a:t>
             </a:r>
-            <a:endParaRPr lang="en-US" sz="2200" dirty="0"/>
+            <a:endParaRPr lang="en-US" sz="2400" dirty="0"/>
           </a:p>
         </p:txBody>
       </p:sp>
